--- a/topic04-selection/unit-1/talk-1/a-misc.pptx
+++ b/topic04-selection/unit-1/talk-1/a-misc.pptx
@@ -217,7 +217,7 @@
           <a:p>
             <a:fld id="{58C3D141-1E1C-433C-AD3A-CD56CBBB4F9F}" type="datetimeFigureOut">
               <a:rPr lang="en-IE" smtClean="0"/>
-              <a:t>01/10/2025</a:t>
+              <a:t>04/10/2025</a:t>
             </a:fld>
             <a:endParaRPr lang="en-IE"/>
           </a:p>
@@ -516,14 +516,14 @@
           <a:noFill/>
           <a:extLst>
             <a:ext uri="{909E8E84-426E-40dd-AFC4-6F175D3DCCD1}">
-              <a14:hiddenFill xmlns="" xmlns:a14="http://schemas.microsoft.com/office/drawing/2010/main">
+              <a14:hiddenFill xmlns:a14="http://schemas.microsoft.com/office/drawing/2010/main" xmlns="">
                 <a:solidFill>
                   <a:srgbClr val="FFFFFF"/>
                 </a:solidFill>
               </a14:hiddenFill>
             </a:ext>
             <a:ext uri="{91240B29-F687-4f45-9708-019B960494DF}">
-              <a14:hiddenLine xmlns="" xmlns:a14="http://schemas.microsoft.com/office/drawing/2010/main" w="9525">
+              <a14:hiddenLine xmlns:a14="http://schemas.microsoft.com/office/drawing/2010/main" xmlns="" w="9525">
                 <a:solidFill>
                   <a:srgbClr val="000000"/>
                 </a:solidFill>
@@ -671,14 +671,14 @@
           <a:noFill/>
           <a:extLst>
             <a:ext uri="{909E8E84-426E-40dd-AFC4-6F175D3DCCD1}">
-              <a14:hiddenFill xmlns="" xmlns:a14="http://schemas.microsoft.com/office/drawing/2010/main">
+              <a14:hiddenFill xmlns:a14="http://schemas.microsoft.com/office/drawing/2010/main" xmlns="">
                 <a:solidFill>
                   <a:srgbClr val="FFFFFF"/>
                 </a:solidFill>
               </a14:hiddenFill>
             </a:ext>
             <a:ext uri="{91240B29-F687-4f45-9708-019B960494DF}">
-              <a14:hiddenLine xmlns="" xmlns:a14="http://schemas.microsoft.com/office/drawing/2010/main" w="9525">
+              <a14:hiddenLine xmlns:a14="http://schemas.microsoft.com/office/drawing/2010/main" xmlns="" w="9525">
                 <a:solidFill>
                   <a:srgbClr val="000000"/>
                 </a:solidFill>
@@ -826,14 +826,14 @@
           <a:noFill/>
           <a:extLst>
             <a:ext uri="{909E8E84-426E-40dd-AFC4-6F175D3DCCD1}">
-              <a14:hiddenFill xmlns="" xmlns:a14="http://schemas.microsoft.com/office/drawing/2010/main">
+              <a14:hiddenFill xmlns:a14="http://schemas.microsoft.com/office/drawing/2010/main" xmlns="">
                 <a:solidFill>
                   <a:srgbClr val="FFFFFF"/>
                 </a:solidFill>
               </a14:hiddenFill>
             </a:ext>
             <a:ext uri="{91240B29-F687-4f45-9708-019B960494DF}">
-              <a14:hiddenLine xmlns="" xmlns:a14="http://schemas.microsoft.com/office/drawing/2010/main" w="9525">
+              <a14:hiddenLine xmlns:a14="http://schemas.microsoft.com/office/drawing/2010/main" xmlns="" w="9525">
                 <a:solidFill>
                   <a:srgbClr val="000000"/>
                 </a:solidFill>
@@ -1005,7 +1005,7 @@
         <p:spPr>
           <a:extLst>
             <a:ext uri="{FAA26D3D-D897-4be2-8F04-BA451C77F1D7}">
-              <ma14:placeholderFlag xmlns="" xmlns:ma14="http://schemas.microsoft.com/office/mac/drawingml/2011/main" val="1"/>
+              <ma14:placeholderFlag xmlns:ma14="http://schemas.microsoft.com/office/mac/drawingml/2011/main" xmlns="" val="1"/>
             </a:ext>
           </a:extLst>
         </p:spPr>
@@ -1721,7 +1721,7 @@
             <a:fld id="{1D8BD707-D9CF-40AE-B4C6-C98DA3205C09}" type="datetimeFigureOut">
               <a:rPr lang="en-US" smtClean="0"/>
               <a:pPr/>
-              <a:t>10/1/25</a:t>
+              <a:t>10/4/25</a:t>
             </a:fld>
             <a:endParaRPr lang="en-US"/>
           </a:p>
@@ -1893,7 +1893,7 @@
             <a:fld id="{1D8BD707-D9CF-40AE-B4C6-C98DA3205C09}" type="datetimeFigureOut">
               <a:rPr lang="en-US" smtClean="0"/>
               <a:pPr/>
-              <a:t>10/1/25</a:t>
+              <a:t>10/4/25</a:t>
             </a:fld>
             <a:endParaRPr lang="en-US"/>
           </a:p>
@@ -2075,7 +2075,7 @@
             <a:fld id="{1D8BD707-D9CF-40AE-B4C6-C98DA3205C09}" type="datetimeFigureOut">
               <a:rPr lang="en-US" smtClean="0"/>
               <a:pPr/>
-              <a:t>10/1/25</a:t>
+              <a:t>10/4/25</a:t>
             </a:fld>
             <a:endParaRPr lang="en-US"/>
           </a:p>
@@ -2808,7 +2808,7 @@
             <a:fld id="{1D8BD707-D9CF-40AE-B4C6-C98DA3205C09}" type="datetimeFigureOut">
               <a:rPr lang="en-US" smtClean="0"/>
               <a:pPr/>
-              <a:t>10/1/25</a:t>
+              <a:t>10/4/25</a:t>
             </a:fld>
             <a:endParaRPr lang="en-US"/>
           </a:p>
@@ -3226,7 +3226,7 @@
             <a:fld id="{1D8BD707-D9CF-40AE-B4C6-C98DA3205C09}" type="datetimeFigureOut">
               <a:rPr lang="en-US" smtClean="0"/>
               <a:pPr/>
-              <a:t>10/1/25</a:t>
+              <a:t>10/4/25</a:t>
             </a:fld>
             <a:endParaRPr lang="en-US"/>
           </a:p>
@@ -3527,7 +3527,7 @@
             <a:fld id="{1D8BD707-D9CF-40AE-B4C6-C98DA3205C09}" type="datetimeFigureOut">
               <a:rPr lang="en-US" smtClean="0"/>
               <a:pPr/>
-              <a:t>10/1/25</a:t>
+              <a:t>10/4/25</a:t>
             </a:fld>
             <a:endParaRPr lang="en-US"/>
           </a:p>
@@ -4116,7 +4116,7 @@
             <a:fld id="{1D8BD707-D9CF-40AE-B4C6-C98DA3205C09}" type="datetimeFigureOut">
               <a:rPr lang="en-US" smtClean="0"/>
               <a:pPr/>
-              <a:t>10/1/25</a:t>
+              <a:t>10/4/25</a:t>
             </a:fld>
             <a:endParaRPr lang="en-US"/>
           </a:p>
@@ -4364,7 +4364,7 @@
             <a:fld id="{1D8BD707-D9CF-40AE-B4C6-C98DA3205C09}" type="datetimeFigureOut">
               <a:rPr lang="en-US" smtClean="0"/>
               <a:pPr/>
-              <a:t>10/1/25</a:t>
+              <a:t>10/4/25</a:t>
             </a:fld>
             <a:endParaRPr lang="en-US"/>
           </a:p>
@@ -4619,7 +4619,7 @@
             <a:fld id="{1D8BD707-D9CF-40AE-B4C6-C98DA3205C09}" type="datetimeFigureOut">
               <a:rPr lang="en-US" smtClean="0"/>
               <a:pPr/>
-              <a:t>10/1/25</a:t>
+              <a:t>10/4/25</a:t>
             </a:fld>
             <a:endParaRPr lang="en-US"/>
           </a:p>
@@ -4898,7 +4898,7 @@
             <a:fld id="{1D8BD707-D9CF-40AE-B4C6-C98DA3205C09}" type="datetimeFigureOut">
               <a:rPr lang="en-US" smtClean="0"/>
               <a:pPr/>
-              <a:t>10/1/25</a:t>
+              <a:t>10/4/25</a:t>
             </a:fld>
             <a:endParaRPr lang="en-US"/>
           </a:p>
@@ -5157,7 +5157,7 @@
             <a:fld id="{1D8BD707-D9CF-40AE-B4C6-C98DA3205C09}" type="datetimeFigureOut">
               <a:rPr lang="en-US" smtClean="0"/>
               <a:pPr/>
-              <a:t>10/1/25</a:t>
+              <a:t>10/4/25</a:t>
             </a:fld>
             <a:endParaRPr lang="en-US"/>
           </a:p>
@@ -5377,7 +5377,7 @@
             <a:fld id="{1D8BD707-D9CF-40AE-B4C6-C98DA3205C09}" type="datetimeFigureOut">
               <a:rPr lang="en-US" smtClean="0"/>
               <a:pPr/>
-              <a:t>10/1/25</a:t>
+              <a:t>10/4/25</a:t>
             </a:fld>
             <a:endParaRPr lang="en-US"/>
           </a:p>
@@ -5784,7 +5784,7 @@
             </a:pPr>
             <a:r>
               <a:rPr lang="en-GB" dirty="0"/>
-              <a:t>Misc</a:t>
+              <a:t>Miscellaneous</a:t>
             </a:r>
             <a:endParaRPr lang="en-GB" dirty="0">
               <a:ea typeface="+mj-ea"/>
@@ -5805,8 +5805,8 @@
         </p:nvSpPr>
         <p:spPr>
           <a:xfrm>
-            <a:off x="98936" y="1580294"/>
-            <a:ext cx="10134430" cy="523220"/>
+            <a:off x="1676400" y="1503560"/>
+            <a:ext cx="7140064" cy="1587102"/>
           </a:xfrm>
         </p:spPr>
         <p:txBody>
@@ -5818,7 +5818,15 @@
             </a:pPr>
             <a:r>
               <a:rPr lang="en-GB" sz="2800" dirty="0"/>
-              <a:t>TODO</a:t>
+              <a:t>Arithmetic Ops, Compound Assignment </a:t>
+            </a:r>
+            <a:r>
+              <a:rPr lang="en-GB" sz="2800" dirty="0" err="1"/>
+              <a:t>Stmts</a:t>
+            </a:r>
+            <a:r>
+              <a:rPr lang="en-GB" sz="2800" dirty="0"/>
+              <a:t>, Order of Eval</a:t>
             </a:r>
             <a:endParaRPr lang="en-GB" sz="2800" dirty="0">
               <a:ea typeface="+mn-ea"/>
@@ -5849,14 +5857,14 @@
           </a:ln>
           <a:extLst>
             <a:ext uri="{909E8E84-426E-40dd-AFC4-6F175D3DCCD1}">
-              <a14:hiddenFill xmlns="" xmlns:a14="http://schemas.microsoft.com/office/drawing/2010/main">
+              <a14:hiddenFill xmlns:a14="http://schemas.microsoft.com/office/drawing/2010/main" xmlns="">
                 <a:solidFill>
                   <a:srgbClr val="FFFFFF"/>
                 </a:solidFill>
               </a14:hiddenFill>
             </a:ext>
             <a:ext uri="{91240B29-F687-4f45-9708-019B960494DF}">
-              <a14:hiddenLine xmlns="" xmlns:a14="http://schemas.microsoft.com/office/drawing/2010/main" w="9525">
+              <a14:hiddenLine xmlns:a14="http://schemas.microsoft.com/office/drawing/2010/main" xmlns="" w="9525">
                 <a:solidFill>
                   <a:srgbClr val="000000"/>
                 </a:solidFill>

--- a/topic04-selection/unit-1/talk-1/a-misc.pptx
+++ b/topic04-selection/unit-1/talk-1/a-misc.pptx
@@ -217,7 +217,7 @@
           <a:p>
             <a:fld id="{58C3D141-1E1C-433C-AD3A-CD56CBBB4F9F}" type="datetimeFigureOut">
               <a:rPr lang="en-IE" smtClean="0"/>
-              <a:t>04/10/2025</a:t>
+              <a:t>16/10/2025</a:t>
             </a:fld>
             <a:endParaRPr lang="en-IE"/>
           </a:p>
@@ -516,14 +516,14 @@
           <a:noFill/>
           <a:extLst>
             <a:ext uri="{909E8E84-426E-40dd-AFC4-6F175D3DCCD1}">
-              <a14:hiddenFill xmlns:a14="http://schemas.microsoft.com/office/drawing/2010/main" xmlns="">
+              <a14:hiddenFill xmlns="" xmlns:a14="http://schemas.microsoft.com/office/drawing/2010/main">
                 <a:solidFill>
                   <a:srgbClr val="FFFFFF"/>
                 </a:solidFill>
               </a14:hiddenFill>
             </a:ext>
             <a:ext uri="{91240B29-F687-4f45-9708-019B960494DF}">
-              <a14:hiddenLine xmlns:a14="http://schemas.microsoft.com/office/drawing/2010/main" xmlns="" w="9525">
+              <a14:hiddenLine xmlns="" xmlns:a14="http://schemas.microsoft.com/office/drawing/2010/main" w="9525">
                 <a:solidFill>
                   <a:srgbClr val="000000"/>
                 </a:solidFill>
@@ -671,14 +671,14 @@
           <a:noFill/>
           <a:extLst>
             <a:ext uri="{909E8E84-426E-40dd-AFC4-6F175D3DCCD1}">
-              <a14:hiddenFill xmlns:a14="http://schemas.microsoft.com/office/drawing/2010/main" xmlns="">
+              <a14:hiddenFill xmlns="" xmlns:a14="http://schemas.microsoft.com/office/drawing/2010/main">
                 <a:solidFill>
                   <a:srgbClr val="FFFFFF"/>
                 </a:solidFill>
               </a14:hiddenFill>
             </a:ext>
             <a:ext uri="{91240B29-F687-4f45-9708-019B960494DF}">
-              <a14:hiddenLine xmlns:a14="http://schemas.microsoft.com/office/drawing/2010/main" xmlns="" w="9525">
+              <a14:hiddenLine xmlns="" xmlns:a14="http://schemas.microsoft.com/office/drawing/2010/main" w="9525">
                 <a:solidFill>
                   <a:srgbClr val="000000"/>
                 </a:solidFill>
@@ -826,14 +826,14 @@
           <a:noFill/>
           <a:extLst>
             <a:ext uri="{909E8E84-426E-40dd-AFC4-6F175D3DCCD1}">
-              <a14:hiddenFill xmlns:a14="http://schemas.microsoft.com/office/drawing/2010/main" xmlns="">
+              <a14:hiddenFill xmlns="" xmlns:a14="http://schemas.microsoft.com/office/drawing/2010/main">
                 <a:solidFill>
                   <a:srgbClr val="FFFFFF"/>
                 </a:solidFill>
               </a14:hiddenFill>
             </a:ext>
             <a:ext uri="{91240B29-F687-4f45-9708-019B960494DF}">
-              <a14:hiddenLine xmlns:a14="http://schemas.microsoft.com/office/drawing/2010/main" xmlns="" w="9525">
+              <a14:hiddenLine xmlns="" xmlns:a14="http://schemas.microsoft.com/office/drawing/2010/main" w="9525">
                 <a:solidFill>
                   <a:srgbClr val="000000"/>
                 </a:solidFill>
@@ -1005,7 +1005,7 @@
         <p:spPr>
           <a:extLst>
             <a:ext uri="{FAA26D3D-D897-4be2-8F04-BA451C77F1D7}">
-              <ma14:placeholderFlag xmlns:ma14="http://schemas.microsoft.com/office/mac/drawingml/2011/main" xmlns="" val="1"/>
+              <ma14:placeholderFlag xmlns="" xmlns:ma14="http://schemas.microsoft.com/office/mac/drawingml/2011/main" val="1"/>
             </a:ext>
           </a:extLst>
         </p:spPr>
@@ -1721,7 +1721,7 @@
             <a:fld id="{1D8BD707-D9CF-40AE-B4C6-C98DA3205C09}" type="datetimeFigureOut">
               <a:rPr lang="en-US" smtClean="0"/>
               <a:pPr/>
-              <a:t>10/4/25</a:t>
+              <a:t>10/16/25</a:t>
             </a:fld>
             <a:endParaRPr lang="en-US"/>
           </a:p>
@@ -1893,7 +1893,7 @@
             <a:fld id="{1D8BD707-D9CF-40AE-B4C6-C98DA3205C09}" type="datetimeFigureOut">
               <a:rPr lang="en-US" smtClean="0"/>
               <a:pPr/>
-              <a:t>10/4/25</a:t>
+              <a:t>10/16/25</a:t>
             </a:fld>
             <a:endParaRPr lang="en-US"/>
           </a:p>
@@ -2075,7 +2075,7 @@
             <a:fld id="{1D8BD707-D9CF-40AE-B4C6-C98DA3205C09}" type="datetimeFigureOut">
               <a:rPr lang="en-US" smtClean="0"/>
               <a:pPr/>
-              <a:t>10/4/25</a:t>
+              <a:t>10/16/25</a:t>
             </a:fld>
             <a:endParaRPr lang="en-US"/>
           </a:p>
@@ -2808,7 +2808,7 @@
             <a:fld id="{1D8BD707-D9CF-40AE-B4C6-C98DA3205C09}" type="datetimeFigureOut">
               <a:rPr lang="en-US" smtClean="0"/>
               <a:pPr/>
-              <a:t>10/4/25</a:t>
+              <a:t>10/16/25</a:t>
             </a:fld>
             <a:endParaRPr lang="en-US"/>
           </a:p>
@@ -3226,7 +3226,7 @@
             <a:fld id="{1D8BD707-D9CF-40AE-B4C6-C98DA3205C09}" type="datetimeFigureOut">
               <a:rPr lang="en-US" smtClean="0"/>
               <a:pPr/>
-              <a:t>10/4/25</a:t>
+              <a:t>10/16/25</a:t>
             </a:fld>
             <a:endParaRPr lang="en-US"/>
           </a:p>
@@ -3527,7 +3527,7 @@
             <a:fld id="{1D8BD707-D9CF-40AE-B4C6-C98DA3205C09}" type="datetimeFigureOut">
               <a:rPr lang="en-US" smtClean="0"/>
               <a:pPr/>
-              <a:t>10/4/25</a:t>
+              <a:t>10/16/25</a:t>
             </a:fld>
             <a:endParaRPr lang="en-US"/>
           </a:p>
@@ -4116,7 +4116,7 @@
             <a:fld id="{1D8BD707-D9CF-40AE-B4C6-C98DA3205C09}" type="datetimeFigureOut">
               <a:rPr lang="en-US" smtClean="0"/>
               <a:pPr/>
-              <a:t>10/4/25</a:t>
+              <a:t>10/16/25</a:t>
             </a:fld>
             <a:endParaRPr lang="en-US"/>
           </a:p>
@@ -4364,7 +4364,7 @@
             <a:fld id="{1D8BD707-D9CF-40AE-B4C6-C98DA3205C09}" type="datetimeFigureOut">
               <a:rPr lang="en-US" smtClean="0"/>
               <a:pPr/>
-              <a:t>10/4/25</a:t>
+              <a:t>10/16/25</a:t>
             </a:fld>
             <a:endParaRPr lang="en-US"/>
           </a:p>
@@ -4619,7 +4619,7 @@
             <a:fld id="{1D8BD707-D9CF-40AE-B4C6-C98DA3205C09}" type="datetimeFigureOut">
               <a:rPr lang="en-US" smtClean="0"/>
               <a:pPr/>
-              <a:t>10/4/25</a:t>
+              <a:t>10/16/25</a:t>
             </a:fld>
             <a:endParaRPr lang="en-US"/>
           </a:p>
@@ -4898,7 +4898,7 @@
             <a:fld id="{1D8BD707-D9CF-40AE-B4C6-C98DA3205C09}" type="datetimeFigureOut">
               <a:rPr lang="en-US" smtClean="0"/>
               <a:pPr/>
-              <a:t>10/4/25</a:t>
+              <a:t>10/16/25</a:t>
             </a:fld>
             <a:endParaRPr lang="en-US"/>
           </a:p>
@@ -5157,7 +5157,7 @@
             <a:fld id="{1D8BD707-D9CF-40AE-B4C6-C98DA3205C09}" type="datetimeFigureOut">
               <a:rPr lang="en-US" smtClean="0"/>
               <a:pPr/>
-              <a:t>10/4/25</a:t>
+              <a:t>10/16/25</a:t>
             </a:fld>
             <a:endParaRPr lang="en-US"/>
           </a:p>
@@ -5377,7 +5377,7 @@
             <a:fld id="{1D8BD707-D9CF-40AE-B4C6-C98DA3205C09}" type="datetimeFigureOut">
               <a:rPr lang="en-US" smtClean="0"/>
               <a:pPr/>
-              <a:t>10/4/25</a:t>
+              <a:t>10/16/25</a:t>
             </a:fld>
             <a:endParaRPr lang="en-US"/>
           </a:p>
@@ -5857,14 +5857,14 @@
           </a:ln>
           <a:extLst>
             <a:ext uri="{909E8E84-426E-40dd-AFC4-6F175D3DCCD1}">
-              <a14:hiddenFill xmlns:a14="http://schemas.microsoft.com/office/drawing/2010/main" xmlns="">
+              <a14:hiddenFill xmlns="" xmlns:a14="http://schemas.microsoft.com/office/drawing/2010/main">
                 <a:solidFill>
                   <a:srgbClr val="FFFFFF"/>
                 </a:solidFill>
               </a14:hiddenFill>
             </a:ext>
             <a:ext uri="{91240B29-F687-4f45-9708-019B960494DF}">
-              <a14:hiddenLine xmlns:a14="http://schemas.microsoft.com/office/drawing/2010/main" xmlns="" w="9525">
+              <a14:hiddenLine xmlns="" xmlns:a14="http://schemas.microsoft.com/office/drawing/2010/main" w="9525">
                 <a:solidFill>
                   <a:srgbClr val="000000"/>
                 </a:solidFill>
@@ -6223,13 +6223,14 @@
             </a:lvl9pPr>
           </a:lstStyle>
           <a:p>
-            <a:pPr algn="r">
+            <a:pPr marL="0" indent="0" algn="r">
               <a:lnSpc>
                 <a:spcPct val="110000"/>
               </a:lnSpc>
               <a:spcBef>
                 <a:spcPts val="0"/>
               </a:spcBef>
+              <a:buNone/>
             </a:pPr>
             <a:r>
               <a:rPr lang="en-IE" sz="2400" dirty="0"/>
@@ -6237,13 +6238,14 @@
             </a:r>
           </a:p>
           <a:p>
-            <a:pPr algn="r">
+            <a:pPr marL="0" indent="0" algn="r">
               <a:lnSpc>
                 <a:spcPct val="110000"/>
               </a:lnSpc>
               <a:spcBef>
                 <a:spcPts val="0"/>
               </a:spcBef>
+              <a:buNone/>
             </a:pPr>
             <a:r>
               <a:rPr lang="en-IE" sz="2400" dirty="0"/>
